--- a/Capacitor Sizing- Ripple Minimization/Journal Paper-Minimization/ACCESS Paper Draft/Modulation/keywaveforms/Figures.pptx
+++ b/Capacitor Sizing- Ripple Minimization/Journal Paper-Minimization/ACCESS Paper Draft/Modulation/keywaveforms/Figures.pptx
@@ -7,6 +7,7 @@
   <p:sldIdLst>
     <p:sldId id="256" r:id="rId2"/>
     <p:sldId id="257" r:id="rId3"/>
+    <p:sldId id="258" r:id="rId4"/>
   </p:sldIdLst>
   <p:sldSz cx="12192000" cy="32057975"/>
   <p:notesSz cx="6858000" cy="9144000"/>
@@ -244,7 +245,7 @@
           <a:p>
             <a:fld id="{A4CCF45F-741B-400A-B6B9-ACB04FA488AE}" type="datetimeFigureOut">
               <a:rPr lang="sv-SE" smtClean="0"/>
-              <a:t>2025-07-22</a:t>
+              <a:t>2025-08-07</a:t>
             </a:fld>
             <a:endParaRPr lang="sv-SE"/>
           </a:p>
@@ -414,7 +415,7 @@
           <a:p>
             <a:fld id="{A4CCF45F-741B-400A-B6B9-ACB04FA488AE}" type="datetimeFigureOut">
               <a:rPr lang="sv-SE" smtClean="0"/>
-              <a:t>2025-07-22</a:t>
+              <a:t>2025-08-07</a:t>
             </a:fld>
             <a:endParaRPr lang="sv-SE"/>
           </a:p>
@@ -594,7 +595,7 @@
           <a:p>
             <a:fld id="{A4CCF45F-741B-400A-B6B9-ACB04FA488AE}" type="datetimeFigureOut">
               <a:rPr lang="sv-SE" smtClean="0"/>
-              <a:t>2025-07-22</a:t>
+              <a:t>2025-08-07</a:t>
             </a:fld>
             <a:endParaRPr lang="sv-SE"/>
           </a:p>
@@ -764,7 +765,7 @@
           <a:p>
             <a:fld id="{A4CCF45F-741B-400A-B6B9-ACB04FA488AE}" type="datetimeFigureOut">
               <a:rPr lang="sv-SE" smtClean="0"/>
-              <a:t>2025-07-22</a:t>
+              <a:t>2025-08-07</a:t>
             </a:fld>
             <a:endParaRPr lang="sv-SE"/>
           </a:p>
@@ -1008,7 +1009,7 @@
           <a:p>
             <a:fld id="{A4CCF45F-741B-400A-B6B9-ACB04FA488AE}" type="datetimeFigureOut">
               <a:rPr lang="sv-SE" smtClean="0"/>
-              <a:t>2025-07-22</a:t>
+              <a:t>2025-08-07</a:t>
             </a:fld>
             <a:endParaRPr lang="sv-SE"/>
           </a:p>
@@ -1240,7 +1241,7 @@
           <a:p>
             <a:fld id="{A4CCF45F-741B-400A-B6B9-ACB04FA488AE}" type="datetimeFigureOut">
               <a:rPr lang="sv-SE" smtClean="0"/>
-              <a:t>2025-07-22</a:t>
+              <a:t>2025-08-07</a:t>
             </a:fld>
             <a:endParaRPr lang="sv-SE"/>
           </a:p>
@@ -1607,7 +1608,7 @@
           <a:p>
             <a:fld id="{A4CCF45F-741B-400A-B6B9-ACB04FA488AE}" type="datetimeFigureOut">
               <a:rPr lang="sv-SE" smtClean="0"/>
-              <a:t>2025-07-22</a:t>
+              <a:t>2025-08-07</a:t>
             </a:fld>
             <a:endParaRPr lang="sv-SE"/>
           </a:p>
@@ -1725,7 +1726,7 @@
           <a:p>
             <a:fld id="{A4CCF45F-741B-400A-B6B9-ACB04FA488AE}" type="datetimeFigureOut">
               <a:rPr lang="sv-SE" smtClean="0"/>
-              <a:t>2025-07-22</a:t>
+              <a:t>2025-08-07</a:t>
             </a:fld>
             <a:endParaRPr lang="sv-SE"/>
           </a:p>
@@ -1820,7 +1821,7 @@
           <a:p>
             <a:fld id="{A4CCF45F-741B-400A-B6B9-ACB04FA488AE}" type="datetimeFigureOut">
               <a:rPr lang="sv-SE" smtClean="0"/>
-              <a:t>2025-07-22</a:t>
+              <a:t>2025-08-07</a:t>
             </a:fld>
             <a:endParaRPr lang="sv-SE"/>
           </a:p>
@@ -2097,7 +2098,7 @@
           <a:p>
             <a:fld id="{A4CCF45F-741B-400A-B6B9-ACB04FA488AE}" type="datetimeFigureOut">
               <a:rPr lang="sv-SE" smtClean="0"/>
-              <a:t>2025-07-22</a:t>
+              <a:t>2025-08-07</a:t>
             </a:fld>
             <a:endParaRPr lang="sv-SE"/>
           </a:p>
@@ -2354,7 +2355,7 @@
           <a:p>
             <a:fld id="{A4CCF45F-741B-400A-B6B9-ACB04FA488AE}" type="datetimeFigureOut">
               <a:rPr lang="sv-SE" smtClean="0"/>
-              <a:t>2025-07-22</a:t>
+              <a:t>2025-08-07</a:t>
             </a:fld>
             <a:endParaRPr lang="sv-SE"/>
           </a:p>
@@ -2567,7 +2568,7 @@
           <a:p>
             <a:fld id="{A4CCF45F-741B-400A-B6B9-ACB04FA488AE}" type="datetimeFigureOut">
               <a:rPr lang="sv-SE" smtClean="0"/>
-              <a:t>2025-07-22</a:t>
+              <a:t>2025-08-07</a:t>
             </a:fld>
             <a:endParaRPr lang="sv-SE"/>
           </a:p>
@@ -3615,6 +3616,322 @@
 </p:sld>
 </file>
 
+<file path=ppt/slides/slide3.xml><?xml version="1.0" encoding="utf-8"?>
+<p:sld xmlns:a="http://schemas.openxmlformats.org/drawingml/2006/main" xmlns:r="http://schemas.openxmlformats.org/officeDocument/2006/relationships" xmlns:p="http://schemas.openxmlformats.org/presentationml/2006/main">
+  <p:cSld>
+    <p:spTree>
+      <p:nvGrpSpPr>
+        <p:cNvPr id="1" name=""/>
+        <p:cNvGrpSpPr/>
+        <p:nvPr/>
+      </p:nvGrpSpPr>
+      <p:grpSpPr>
+        <a:xfrm>
+          <a:off x="0" y="0"/>
+          <a:ext cx="0" cy="0"/>
+          <a:chOff x="0" y="0"/>
+          <a:chExt cx="0" cy="0"/>
+        </a:xfrm>
+      </p:grpSpPr>
+      <p:sp>
+        <p:nvSpPr>
+          <p:cNvPr id="4" name="TextBox 3"/>
+          <p:cNvSpPr txBox="1"/>
+          <p:nvPr/>
+        </p:nvSpPr>
+        <p:spPr>
+          <a:xfrm>
+            <a:off x="2483757" y="15572834"/>
+            <a:ext cx="769257" cy="477054"/>
+          </a:xfrm>
+          <a:prstGeom prst="rect">
+            <a:avLst/>
+          </a:prstGeom>
+          <a:noFill/>
+        </p:spPr>
+        <p:txBody>
+          <a:bodyPr wrap="square" rtlCol="0">
+            <a:spAutoFit/>
+          </a:bodyPr>
+          <a:lstStyle/>
+          <a:p>
+            <a:r>
+              <a:rPr lang="en-US" sz="2500" dirty="0" smtClean="0">
+                <a:latin typeface="Times New Roman" panose="02020603050405020304" pitchFamily="18" charset="0"/>
+                <a:cs typeface="Times New Roman" panose="02020603050405020304" pitchFamily="18" charset="0"/>
+              </a:rPr>
+              <a:t>(a)</a:t>
+            </a:r>
+            <a:endParaRPr lang="sv-SE" sz="2500" dirty="0">
+              <a:latin typeface="Times New Roman" panose="02020603050405020304" pitchFamily="18" charset="0"/>
+              <a:cs typeface="Times New Roman" panose="02020603050405020304" pitchFamily="18" charset="0"/>
+            </a:endParaRPr>
+          </a:p>
+        </p:txBody>
+      </p:sp>
+      <p:sp>
+        <p:nvSpPr>
+          <p:cNvPr id="5" name="TextBox 4"/>
+          <p:cNvSpPr txBox="1"/>
+          <p:nvPr/>
+        </p:nvSpPr>
+        <p:spPr>
+          <a:xfrm>
+            <a:off x="8240486" y="15572834"/>
+            <a:ext cx="769257" cy="477054"/>
+          </a:xfrm>
+          <a:prstGeom prst="rect">
+            <a:avLst/>
+          </a:prstGeom>
+          <a:noFill/>
+        </p:spPr>
+        <p:txBody>
+          <a:bodyPr wrap="square" rtlCol="0">
+            <a:spAutoFit/>
+          </a:bodyPr>
+          <a:lstStyle/>
+          <a:p>
+            <a:r>
+              <a:rPr lang="en-US" sz="2500" dirty="0" smtClean="0">
+                <a:latin typeface="Times New Roman" panose="02020603050405020304" pitchFamily="18" charset="0"/>
+                <a:cs typeface="Times New Roman" panose="02020603050405020304" pitchFamily="18" charset="0"/>
+              </a:rPr>
+              <a:t>(b)</a:t>
+            </a:r>
+            <a:endParaRPr lang="sv-SE" sz="2500" dirty="0">
+              <a:latin typeface="Times New Roman" panose="02020603050405020304" pitchFamily="18" charset="0"/>
+              <a:cs typeface="Times New Roman" panose="02020603050405020304" pitchFamily="18" charset="0"/>
+            </a:endParaRPr>
+          </a:p>
+        </p:txBody>
+      </p:sp>
+      <p:sp>
+        <p:nvSpPr>
+          <p:cNvPr id="11" name="TextBox 10"/>
+          <p:cNvSpPr txBox="1"/>
+          <p:nvPr/>
+        </p:nvSpPr>
+        <p:spPr>
+          <a:xfrm>
+            <a:off x="2483757" y="19914280"/>
+            <a:ext cx="769257" cy="477054"/>
+          </a:xfrm>
+          <a:prstGeom prst="rect">
+            <a:avLst/>
+          </a:prstGeom>
+          <a:noFill/>
+        </p:spPr>
+        <p:txBody>
+          <a:bodyPr wrap="square" rtlCol="0">
+            <a:spAutoFit/>
+          </a:bodyPr>
+          <a:lstStyle/>
+          <a:p>
+            <a:r>
+              <a:rPr lang="en-US" sz="2500" dirty="0" smtClean="0">
+                <a:latin typeface="Times New Roman" panose="02020603050405020304" pitchFamily="18" charset="0"/>
+                <a:cs typeface="Times New Roman" panose="02020603050405020304" pitchFamily="18" charset="0"/>
+              </a:rPr>
+              <a:t>(c)</a:t>
+            </a:r>
+            <a:endParaRPr lang="sv-SE" sz="2500" dirty="0">
+              <a:latin typeface="Times New Roman" panose="02020603050405020304" pitchFamily="18" charset="0"/>
+              <a:cs typeface="Times New Roman" panose="02020603050405020304" pitchFamily="18" charset="0"/>
+            </a:endParaRPr>
+          </a:p>
+        </p:txBody>
+      </p:sp>
+      <p:sp>
+        <p:nvSpPr>
+          <p:cNvPr id="12" name="TextBox 11"/>
+          <p:cNvSpPr txBox="1"/>
+          <p:nvPr/>
+        </p:nvSpPr>
+        <p:spPr>
+          <a:xfrm>
+            <a:off x="8240486" y="19914280"/>
+            <a:ext cx="769257" cy="477054"/>
+          </a:xfrm>
+          <a:prstGeom prst="rect">
+            <a:avLst/>
+          </a:prstGeom>
+          <a:noFill/>
+        </p:spPr>
+        <p:txBody>
+          <a:bodyPr wrap="square" rtlCol="0">
+            <a:spAutoFit/>
+          </a:bodyPr>
+          <a:lstStyle/>
+          <a:p>
+            <a:r>
+              <a:rPr lang="en-US" sz="2500" dirty="0" smtClean="0">
+                <a:latin typeface="Times New Roman" panose="02020603050405020304" pitchFamily="18" charset="0"/>
+                <a:cs typeface="Times New Roman" panose="02020603050405020304" pitchFamily="18" charset="0"/>
+              </a:rPr>
+              <a:t>(d)</a:t>
+            </a:r>
+            <a:endParaRPr lang="sv-SE" sz="2500" dirty="0">
+              <a:latin typeface="Times New Roman" panose="02020603050405020304" pitchFamily="18" charset="0"/>
+              <a:cs typeface="Times New Roman" panose="02020603050405020304" pitchFamily="18" charset="0"/>
+            </a:endParaRPr>
+          </a:p>
+        </p:txBody>
+      </p:sp>
+      <p:sp>
+        <p:nvSpPr>
+          <p:cNvPr id="13" name="TextBox 12"/>
+          <p:cNvSpPr txBox="1"/>
+          <p:nvPr/>
+        </p:nvSpPr>
+        <p:spPr>
+          <a:xfrm>
+            <a:off x="5270500" y="8699500"/>
+            <a:ext cx="1778000" cy="923330"/>
+          </a:xfrm>
+          <a:prstGeom prst="rect">
+            <a:avLst/>
+          </a:prstGeom>
+          <a:noFill/>
+        </p:spPr>
+        <p:txBody>
+          <a:bodyPr wrap="square" rtlCol="0">
+            <a:spAutoFit/>
+          </a:bodyPr>
+          <a:lstStyle/>
+          <a:p>
+            <a:r>
+              <a:rPr lang="en-US" dirty="0" smtClean="0"/>
+              <a:t>m=0.6 pf= 0.9</a:t>
+            </a:r>
+          </a:p>
+          <a:p>
+            <a:r>
+              <a:rPr lang="en-US" dirty="0" smtClean="0"/>
+              <a:t>M=0.8 pf= 0.95</a:t>
+            </a:r>
+          </a:p>
+          <a:p>
+            <a:r>
+              <a:rPr lang="en-US" dirty="0" err="1" smtClean="0"/>
+              <a:t>Iph</a:t>
+            </a:r>
+            <a:r>
+              <a:rPr lang="en-US" dirty="0" smtClean="0"/>
+              <a:t>= 1 per unit</a:t>
+            </a:r>
+            <a:endParaRPr lang="sv-SE" dirty="0"/>
+          </a:p>
+        </p:txBody>
+      </p:sp>
+      <p:pic>
+        <p:nvPicPr>
+          <p:cNvPr id="16" name="Picture 15"/>
+          <p:cNvPicPr>
+            <a:picLocks noChangeAspect="1"/>
+          </p:cNvPicPr>
+          <p:nvPr/>
+        </p:nvPicPr>
+        <p:blipFill>
+          <a:blip r:embed="rId2"/>
+          <a:stretch>
+            <a:fillRect/>
+          </a:stretch>
+        </p:blipFill>
+        <p:spPr>
+          <a:xfrm>
+            <a:off x="5573486" y="15913780"/>
+            <a:ext cx="5334000" cy="4000500"/>
+          </a:xfrm>
+          <a:prstGeom prst="rect">
+            <a:avLst/>
+          </a:prstGeom>
+        </p:spPr>
+      </p:pic>
+      <p:pic>
+        <p:nvPicPr>
+          <p:cNvPr id="17" name="Picture 16"/>
+          <p:cNvPicPr>
+            <a:picLocks noChangeAspect="1"/>
+          </p:cNvPicPr>
+          <p:nvPr/>
+        </p:nvPicPr>
+        <p:blipFill>
+          <a:blip r:embed="rId3"/>
+          <a:stretch>
+            <a:fillRect/>
+          </a:stretch>
+        </p:blipFill>
+        <p:spPr>
+          <a:xfrm>
+            <a:off x="0" y="15913780"/>
+            <a:ext cx="5334000" cy="4000500"/>
+          </a:xfrm>
+          <a:prstGeom prst="rect">
+            <a:avLst/>
+          </a:prstGeom>
+        </p:spPr>
+      </p:pic>
+      <p:pic>
+        <p:nvPicPr>
+          <p:cNvPr id="18" name="Picture 17"/>
+          <p:cNvPicPr>
+            <a:picLocks noChangeAspect="1"/>
+          </p:cNvPicPr>
+          <p:nvPr/>
+        </p:nvPicPr>
+        <p:blipFill>
+          <a:blip r:embed="rId4"/>
+          <a:stretch>
+            <a:fillRect/>
+          </a:stretch>
+        </p:blipFill>
+        <p:spPr>
+          <a:xfrm>
+            <a:off x="0" y="11572334"/>
+            <a:ext cx="5334000" cy="4000500"/>
+          </a:xfrm>
+          <a:prstGeom prst="rect">
+            <a:avLst/>
+          </a:prstGeom>
+        </p:spPr>
+      </p:pic>
+      <p:pic>
+        <p:nvPicPr>
+          <p:cNvPr id="19" name="Picture 18"/>
+          <p:cNvPicPr>
+            <a:picLocks noChangeAspect="1"/>
+          </p:cNvPicPr>
+          <p:nvPr/>
+        </p:nvPicPr>
+        <p:blipFill>
+          <a:blip r:embed="rId5"/>
+          <a:stretch>
+            <a:fillRect/>
+          </a:stretch>
+        </p:blipFill>
+        <p:spPr>
+          <a:xfrm>
+            <a:off x="5573486" y="11572334"/>
+            <a:ext cx="5334000" cy="4000500"/>
+          </a:xfrm>
+          <a:prstGeom prst="rect">
+            <a:avLst/>
+          </a:prstGeom>
+        </p:spPr>
+      </p:pic>
+    </p:spTree>
+    <p:extLst>
+      <p:ext uri="{BB962C8B-B14F-4D97-AF65-F5344CB8AC3E}">
+        <p14:creationId xmlns:p14="http://schemas.microsoft.com/office/powerpoint/2010/main" val="1741484602"/>
+      </p:ext>
+    </p:extLst>
+  </p:cSld>
+  <p:clrMapOvr>
+    <a:masterClrMapping/>
+  </p:clrMapOvr>
+</p:sld>
+</file>
+
 <file path=ppt/theme/theme1.xml><?xml version="1.0" encoding="utf-8"?>
 <a:theme xmlns:a="http://schemas.openxmlformats.org/drawingml/2006/main" name="Office Theme">
   <a:themeElements>
